--- a/deliverables/帮扶村振兴管理系统介绍.pptx
+++ b/deliverables/帮扶村振兴管理系统介绍.pptx
@@ -12,6 +12,7 @@
     <p:sldId id="260" r:id="rId11"/>
     <p:sldId id="261" r:id="rId12"/>
     <p:sldId id="262" r:id="rId13"/>
+    <p:sldId id="263" r:id="rId14"/>
   </p:sldIdLst>
   <p:sldSz cx="12191695" cy="6858000" type="screen4x3"/>
   <p:notesSz cx="6858000" cy="9144000"/>
@@ -3406,7 +3407,7 @@
               </a:defRPr>
             </a:pPr>
             <a:r>
-              <a:t>版本 v1.4.2  |  2026年7月</a:t>
+              <a:t>版本 v1.12.6  |  2026年7月</a:t>
             </a:r>
           </a:p>
         </p:txBody>
@@ -9720,6 +9721,109 @@
             </a:pPr>
             <a:r>
               <a:t>帮扶村振兴管理系统  ·  让帮扶工作更精准、更高效、更安全</a:t>
+            </a:r>
+          </a:p>
+        </p:txBody>
+      </p:sp>
+    </p:spTree>
+  </p:cSld>
+  <p:clrMapOvr>
+    <a:masterClrMapping/>
+  </p:clrMapOvr>
+</p:sld>
+</file>
+
+<file path=ppt/slides/slide8.xml><?xml version="1.0" encoding="utf-8"?>
+<p:sld xmlns:a="http://schemas.openxmlformats.org/drawingml/2006/main" xmlns:p="http://schemas.openxmlformats.org/presentationml/2006/main" xmlns:r="http://schemas.openxmlformats.org/officeDocument/2006/relationships">
+  <p:cSld>
+    <p:spTree>
+      <p:nvGrpSpPr>
+        <p:cNvPr id="1" name=""/>
+        <p:cNvGrpSpPr/>
+        <p:nvPr/>
+      </p:nvGrpSpPr>
+      <p:grpSpPr/>
+      <p:sp>
+        <p:nvSpPr>
+          <p:cNvPr id="2" name="Title 1"/>
+          <p:cNvSpPr>
+            <a:spLocks noGrp="1"/>
+          </p:cNvSpPr>
+          <p:nvPr>
+            <p:ph type="title"/>
+          </p:nvPr>
+        </p:nvSpPr>
+        <p:spPr/>
+        <p:txBody>
+          <a:bodyPr/>
+          <a:lstStyle/>
+          <a:p>
+            <a:r>
+              <a:t>版本更新说明 · v1.12.6（2026-09-12）</a:t>
+            </a:r>
+          </a:p>
+        </p:txBody>
+      </p:sp>
+      <p:sp>
+        <p:nvSpPr>
+          <p:cNvPr id="3" name="Content Placeholder 2"/>
+          <p:cNvSpPr>
+            <a:spLocks noGrp="1"/>
+          </p:cNvSpPr>
+          <p:nvPr>
+            <p:ph idx="1"/>
+          </p:nvPr>
+        </p:nvSpPr>
+        <p:spPr/>
+        <p:txBody>
+          <a:bodyPr/>
+          <a:lstStyle/>
+          <a:p>
+            <a:pPr>
+              <a:defRPr sz="1600"/>
+            </a:pPr>
+            <a:r>
+              <a:t>• 遗留风险治理第一批：调度器 Timer 生命周期统一（可停止、无泄漏、分片清理接入调度）</a:t>
+            </a:r>
+          </a:p>
+          <a:p>
+            <a:pPr>
+              <a:defRPr sz="1600"/>
+            </a:pPr>
+            <a:r>
+              <a:t>• 启动期不再执行 VACUUM / 全库扫描，消除启动窗口 database is locked 抖动</a:t>
+            </a:r>
+          </a:p>
+          <a:p>
+            <a:pPr>
+              <a:defRPr sz="1600"/>
+            </a:pPr>
+            <a:r>
+              <a:t>• multipart 请求体分级预检（备份恢复 10GB，其余 512MB），防超大请求打爆内存</a:t>
+            </a:r>
+          </a:p>
+          <a:p>
+            <a:pPr>
+              <a:defRPr sz="1600"/>
+            </a:pPr>
+            <a:r>
+              <a:t>• 备份语义 fail-loud：一致性快照失败即中止，杜绝「陈旧但合法」的备份包</a:t>
+            </a:r>
+          </a:p>
+          <a:p>
+            <a:pPr>
+              <a:defRPr sz="1600"/>
+            </a:pPr>
+            <a:r>
+              <a:t>• 安全加固延续：目录穿越、存储型 XSS、Windows 文件占用、并发竞态（v1.12.5）</a:t>
+            </a:r>
+          </a:p>
+          <a:p>
+            <a:pPr>
+              <a:defRPr sz="1600"/>
+            </a:pPr>
+            <a:r>
+              <a:t>• 质量基线：后端 11089+ 用例 / 前端 302 文件全绿，双向覆盖率 100%</a:t>
             </a:r>
           </a:p>
         </p:txBody>
